--- a/images/images.pptx
+++ b/images/images.pptx
@@ -5,7 +5,7 @@
     <p:sldMasterId id="2147483648" r:id="rId1"/>
   </p:sldMasterIdLst>
   <p:notesMasterIdLst>
-    <p:notesMasterId r:id="rId10"/>
+    <p:notesMasterId r:id="rId11"/>
   </p:notesMasterIdLst>
   <p:sldIdLst>
     <p:sldId id="256" r:id="rId2"/>
@@ -16,6 +16,7 @@
     <p:sldId id="264" r:id="rId7"/>
     <p:sldId id="265" r:id="rId8"/>
     <p:sldId id="268" r:id="rId9"/>
+    <p:sldId id="269" r:id="rId10"/>
   </p:sldIdLst>
   <p:sldSz cx="12192000" cy="6858000"/>
   <p:notesSz cx="6858000" cy="9144000"/>
@@ -204,7 +205,7 @@
           <a:p>
             <a:fld id="{AD42B31F-4ABA-274F-9BB4-DA3A6583FDB8}" type="datetimeFigureOut">
               <a:rPr lang="en-US" smtClean="0"/>
-              <a:t>8/28/26</a:t>
+              <a:t>10/8/26</a:t>
             </a:fld>
             <a:endParaRPr lang="en-US"/>
           </a:p>
@@ -1113,7 +1114,7 @@
           <a:p>
             <a:fld id="{0D21F05F-ACFB-0C4D-9827-53BE568178E4}" type="datetimeFigureOut">
               <a:rPr lang="en-US" smtClean="0"/>
-              <a:t>8/28/26</a:t>
+              <a:t>10/8/26</a:t>
             </a:fld>
             <a:endParaRPr lang="en-US"/>
           </a:p>
@@ -1313,7 +1314,7 @@
           <a:p>
             <a:fld id="{0D21F05F-ACFB-0C4D-9827-53BE568178E4}" type="datetimeFigureOut">
               <a:rPr lang="en-US" smtClean="0"/>
-              <a:t>8/28/26</a:t>
+              <a:t>10/8/26</a:t>
             </a:fld>
             <a:endParaRPr lang="en-US"/>
           </a:p>
@@ -1523,7 +1524,7 @@
           <a:p>
             <a:fld id="{0D21F05F-ACFB-0C4D-9827-53BE568178E4}" type="datetimeFigureOut">
               <a:rPr lang="en-US" smtClean="0"/>
-              <a:t>8/28/26</a:t>
+              <a:t>10/8/26</a:t>
             </a:fld>
             <a:endParaRPr lang="en-US"/>
           </a:p>
@@ -1723,7 +1724,7 @@
           <a:p>
             <a:fld id="{0D21F05F-ACFB-0C4D-9827-53BE568178E4}" type="datetimeFigureOut">
               <a:rPr lang="en-US" smtClean="0"/>
-              <a:t>8/28/26</a:t>
+              <a:t>10/8/26</a:t>
             </a:fld>
             <a:endParaRPr lang="en-US"/>
           </a:p>
@@ -1999,7 +2000,7 @@
           <a:p>
             <a:fld id="{0D21F05F-ACFB-0C4D-9827-53BE568178E4}" type="datetimeFigureOut">
               <a:rPr lang="en-US" smtClean="0"/>
-              <a:t>8/28/26</a:t>
+              <a:t>10/8/26</a:t>
             </a:fld>
             <a:endParaRPr lang="en-US"/>
           </a:p>
@@ -2267,7 +2268,7 @@
           <a:p>
             <a:fld id="{0D21F05F-ACFB-0C4D-9827-53BE568178E4}" type="datetimeFigureOut">
               <a:rPr lang="en-US" smtClean="0"/>
-              <a:t>8/28/26</a:t>
+              <a:t>10/8/26</a:t>
             </a:fld>
             <a:endParaRPr lang="en-US"/>
           </a:p>
@@ -2682,7 +2683,7 @@
           <a:p>
             <a:fld id="{0D21F05F-ACFB-0C4D-9827-53BE568178E4}" type="datetimeFigureOut">
               <a:rPr lang="en-US" smtClean="0"/>
-              <a:t>8/28/26</a:t>
+              <a:t>10/8/26</a:t>
             </a:fld>
             <a:endParaRPr lang="en-US"/>
           </a:p>
@@ -2824,7 +2825,7 @@
           <a:p>
             <a:fld id="{0D21F05F-ACFB-0C4D-9827-53BE568178E4}" type="datetimeFigureOut">
               <a:rPr lang="en-US" smtClean="0"/>
-              <a:t>8/28/26</a:t>
+              <a:t>10/8/26</a:t>
             </a:fld>
             <a:endParaRPr lang="en-US"/>
           </a:p>
@@ -2937,7 +2938,7 @@
           <a:p>
             <a:fld id="{0D21F05F-ACFB-0C4D-9827-53BE568178E4}" type="datetimeFigureOut">
               <a:rPr lang="en-US" smtClean="0"/>
-              <a:t>8/28/26</a:t>
+              <a:t>10/8/26</a:t>
             </a:fld>
             <a:endParaRPr lang="en-US"/>
           </a:p>
@@ -3250,7 +3251,7 @@
           <a:p>
             <a:fld id="{0D21F05F-ACFB-0C4D-9827-53BE568178E4}" type="datetimeFigureOut">
               <a:rPr lang="en-US" smtClean="0"/>
-              <a:t>8/28/26</a:t>
+              <a:t>10/8/26</a:t>
             </a:fld>
             <a:endParaRPr lang="en-US"/>
           </a:p>
@@ -3539,7 +3540,7 @@
           <a:p>
             <a:fld id="{0D21F05F-ACFB-0C4D-9827-53BE568178E4}" type="datetimeFigureOut">
               <a:rPr lang="en-US" smtClean="0"/>
-              <a:t>8/28/26</a:t>
+              <a:t>10/8/26</a:t>
             </a:fld>
             <a:endParaRPr lang="en-US"/>
           </a:p>
@@ -3782,7 +3783,7 @@
           <a:p>
             <a:fld id="{0D21F05F-ACFB-0C4D-9827-53BE568178E4}" type="datetimeFigureOut">
               <a:rPr lang="en-US" smtClean="0"/>
-              <a:t>8/28/26</a:t>
+              <a:t>10/8/26</a:t>
             </a:fld>
             <a:endParaRPr lang="en-US"/>
           </a:p>
@@ -23022,6 +23023,908 @@
     <p:extLst>
       <p:ext uri="{BB962C8B-B14F-4D97-AF65-F5344CB8AC3E}">
         <p14:creationId xmlns:p14="http://schemas.microsoft.com/office/powerpoint/2010/main" val="3738329265"/>
+      </p:ext>
+    </p:extLst>
+  </p:cSld>
+  <p:clrMapOvr>
+    <a:masterClrMapping/>
+  </p:clrMapOvr>
+</p:sld>
+</file>
+
+<file path=ppt/slides/slide9.xml><?xml version="1.0" encoding="utf-8"?>
+<p:sld xmlns:a="http://schemas.openxmlformats.org/drawingml/2006/main" xmlns:r="http://schemas.openxmlformats.org/officeDocument/2006/relationships" xmlns:p="http://schemas.openxmlformats.org/presentationml/2006/main">
+  <p:cSld>
+    <p:spTree>
+      <p:nvGrpSpPr>
+        <p:cNvPr id="1" name="">
+          <a:extLst>
+            <a:ext uri="{FF2B5EF4-FFF2-40B4-BE49-F238E27FC236}">
+              <a16:creationId xmlns:a16="http://schemas.microsoft.com/office/drawing/2014/main" id="{FBF1C769-8E52-03CB-BB12-289DEFB2849B}"/>
+            </a:ext>
+          </a:extLst>
+        </p:cNvPr>
+        <p:cNvGrpSpPr/>
+        <p:nvPr/>
+      </p:nvGrpSpPr>
+      <p:grpSpPr>
+        <a:xfrm>
+          <a:off x="0" y="0"/>
+          <a:ext cx="0" cy="0"/>
+          <a:chOff x="0" y="0"/>
+          <a:chExt cx="0" cy="0"/>
+        </a:xfrm>
+      </p:grpSpPr>
+      <p:grpSp>
+        <p:nvGrpSpPr>
+          <p:cNvPr id="150" name="Group 149">
+            <a:extLst>
+              <a:ext uri="{FF2B5EF4-FFF2-40B4-BE49-F238E27FC236}">
+                <a16:creationId xmlns:a16="http://schemas.microsoft.com/office/drawing/2014/main" id="{5F2BAEE8-C7E2-A5C3-FABF-9DFF741954A6}"/>
+              </a:ext>
+            </a:extLst>
+          </p:cNvPr>
+          <p:cNvGrpSpPr/>
+          <p:nvPr/>
+        </p:nvGrpSpPr>
+        <p:grpSpPr>
+          <a:xfrm>
+            <a:off x="1637415" y="678911"/>
+            <a:ext cx="9161724" cy="5269345"/>
+            <a:chOff x="1637415" y="678911"/>
+            <a:chExt cx="9161724" cy="5269345"/>
+          </a:xfrm>
+        </p:grpSpPr>
+        <p:sp>
+          <p:nvSpPr>
+            <p:cNvPr id="7" name="Oval 6">
+              <a:extLst>
+                <a:ext uri="{FF2B5EF4-FFF2-40B4-BE49-F238E27FC236}">
+                  <a16:creationId xmlns:a16="http://schemas.microsoft.com/office/drawing/2014/main" id="{FA854D1B-B8A2-6582-AD49-CDF46BD63463}"/>
+                </a:ext>
+              </a:extLst>
+            </p:cNvPr>
+            <p:cNvSpPr/>
+            <p:nvPr/>
+          </p:nvSpPr>
+          <p:spPr>
+            <a:xfrm>
+              <a:off x="1637415" y="1382232"/>
+              <a:ext cx="2094614" cy="1318437"/>
+            </a:xfrm>
+            <a:prstGeom prst="ellipse">
+              <a:avLst/>
+            </a:prstGeom>
+            <a:solidFill>
+              <a:schemeClr val="bg1">
+                <a:lumMod val="85000"/>
+                <a:alpha val="40000"/>
+              </a:schemeClr>
+            </a:solidFill>
+            <a:ln w="31750"/>
+          </p:spPr>
+          <p:style>
+            <a:lnRef idx="2">
+              <a:schemeClr val="accent1">
+                <a:shade val="15000"/>
+              </a:schemeClr>
+            </a:lnRef>
+            <a:fillRef idx="1">
+              <a:schemeClr val="accent1"/>
+            </a:fillRef>
+            <a:effectRef idx="0">
+              <a:schemeClr val="accent1"/>
+            </a:effectRef>
+            <a:fontRef idx="minor">
+              <a:schemeClr val="lt1"/>
+            </a:fontRef>
+          </p:style>
+          <p:txBody>
+            <a:bodyPr rtlCol="0" anchor="ctr"/>
+            <a:lstStyle/>
+            <a:p>
+              <a:pPr algn="ctr"/>
+              <a:r>
+                <a:rPr lang="en-US" sz="2400" dirty="0">
+                  <a:solidFill>
+                    <a:schemeClr val="tx1"/>
+                  </a:solidFill>
+                </a:rPr>
+                <a:t>Stage 2</a:t>
+              </a:r>
+            </a:p>
+          </p:txBody>
+        </p:sp>
+        <p:sp>
+          <p:nvSpPr>
+            <p:cNvPr id="8" name="Oval 7">
+              <a:extLst>
+                <a:ext uri="{FF2B5EF4-FFF2-40B4-BE49-F238E27FC236}">
+                  <a16:creationId xmlns:a16="http://schemas.microsoft.com/office/drawing/2014/main" id="{EA1AE2D1-9618-BB26-ABBB-DA5AE48BCEC6}"/>
+                </a:ext>
+              </a:extLst>
+            </p:cNvPr>
+            <p:cNvSpPr/>
+            <p:nvPr/>
+          </p:nvSpPr>
+          <p:spPr>
+            <a:xfrm>
+              <a:off x="5170970" y="1382231"/>
+              <a:ext cx="2094614" cy="1318437"/>
+            </a:xfrm>
+            <a:prstGeom prst="ellipse">
+              <a:avLst/>
+            </a:prstGeom>
+            <a:solidFill>
+              <a:schemeClr val="bg1">
+                <a:lumMod val="85000"/>
+                <a:alpha val="40000"/>
+              </a:schemeClr>
+            </a:solidFill>
+            <a:ln w="31750"/>
+          </p:spPr>
+          <p:style>
+            <a:lnRef idx="2">
+              <a:schemeClr val="accent1">
+                <a:shade val="15000"/>
+              </a:schemeClr>
+            </a:lnRef>
+            <a:fillRef idx="1">
+              <a:schemeClr val="accent1"/>
+            </a:fillRef>
+            <a:effectRef idx="0">
+              <a:schemeClr val="accent1"/>
+            </a:effectRef>
+            <a:fontRef idx="minor">
+              <a:schemeClr val="lt1"/>
+            </a:fontRef>
+          </p:style>
+          <p:txBody>
+            <a:bodyPr rtlCol="0" anchor="ctr"/>
+            <a:lstStyle/>
+            <a:p>
+              <a:pPr algn="ctr"/>
+              <a:r>
+                <a:rPr lang="en-US" sz="2400" dirty="0">
+                  <a:solidFill>
+                    <a:schemeClr val="tx1"/>
+                  </a:solidFill>
+                </a:rPr>
+                <a:t>Stage 3</a:t>
+              </a:r>
+            </a:p>
+          </p:txBody>
+        </p:sp>
+        <p:sp>
+          <p:nvSpPr>
+            <p:cNvPr id="9" name="Oval 8">
+              <a:extLst>
+                <a:ext uri="{FF2B5EF4-FFF2-40B4-BE49-F238E27FC236}">
+                  <a16:creationId xmlns:a16="http://schemas.microsoft.com/office/drawing/2014/main" id="{4FDE13CB-74E3-B6AF-89EB-C4C73956C67B}"/>
+                </a:ext>
+              </a:extLst>
+            </p:cNvPr>
+            <p:cNvSpPr/>
+            <p:nvPr/>
+          </p:nvSpPr>
+          <p:spPr>
+            <a:xfrm>
+              <a:off x="8704525" y="1382231"/>
+              <a:ext cx="2094614" cy="1318437"/>
+            </a:xfrm>
+            <a:prstGeom prst="ellipse">
+              <a:avLst/>
+            </a:prstGeom>
+            <a:solidFill>
+              <a:schemeClr val="bg1">
+                <a:lumMod val="85000"/>
+                <a:alpha val="40000"/>
+              </a:schemeClr>
+            </a:solidFill>
+            <a:ln w="31750"/>
+          </p:spPr>
+          <p:style>
+            <a:lnRef idx="2">
+              <a:schemeClr val="accent1">
+                <a:shade val="15000"/>
+              </a:schemeClr>
+            </a:lnRef>
+            <a:fillRef idx="1">
+              <a:schemeClr val="accent1"/>
+            </a:fillRef>
+            <a:effectRef idx="0">
+              <a:schemeClr val="accent1"/>
+            </a:effectRef>
+            <a:fontRef idx="minor">
+              <a:schemeClr val="lt1"/>
+            </a:fontRef>
+          </p:style>
+          <p:txBody>
+            <a:bodyPr rtlCol="0" anchor="ctr"/>
+            <a:lstStyle/>
+            <a:p>
+              <a:pPr algn="ctr"/>
+              <a:r>
+                <a:rPr lang="en-US" sz="2400" dirty="0">
+                  <a:solidFill>
+                    <a:schemeClr val="tx1"/>
+                  </a:solidFill>
+                </a:rPr>
+                <a:t>Stage 3-I</a:t>
+              </a:r>
+            </a:p>
+          </p:txBody>
+        </p:sp>
+        <p:sp>
+          <p:nvSpPr>
+            <p:cNvPr id="10" name="Oval 9">
+              <a:extLst>
+                <a:ext uri="{FF2B5EF4-FFF2-40B4-BE49-F238E27FC236}">
+                  <a16:creationId xmlns:a16="http://schemas.microsoft.com/office/drawing/2014/main" id="{5B9C7C3A-AD78-881F-E890-83BBE9915D0F}"/>
+                </a:ext>
+              </a:extLst>
+            </p:cNvPr>
+            <p:cNvSpPr/>
+            <p:nvPr/>
+          </p:nvSpPr>
+          <p:spPr>
+            <a:xfrm>
+              <a:off x="5170970" y="4629819"/>
+              <a:ext cx="2094614" cy="1318437"/>
+            </a:xfrm>
+            <a:prstGeom prst="ellipse">
+              <a:avLst/>
+            </a:prstGeom>
+            <a:solidFill>
+              <a:schemeClr val="bg1">
+                <a:lumMod val="85000"/>
+                <a:alpha val="40000"/>
+              </a:schemeClr>
+            </a:solidFill>
+            <a:ln w="31750"/>
+          </p:spPr>
+          <p:style>
+            <a:lnRef idx="2">
+              <a:schemeClr val="accent1">
+                <a:shade val="15000"/>
+              </a:schemeClr>
+            </a:lnRef>
+            <a:fillRef idx="1">
+              <a:schemeClr val="accent1"/>
+            </a:fillRef>
+            <a:effectRef idx="0">
+              <a:schemeClr val="accent1"/>
+            </a:effectRef>
+            <a:fontRef idx="minor">
+              <a:schemeClr val="lt1"/>
+            </a:fontRef>
+          </p:style>
+          <p:txBody>
+            <a:bodyPr rtlCol="0" anchor="ctr"/>
+            <a:lstStyle/>
+            <a:p>
+              <a:pPr algn="ctr"/>
+              <a:r>
+                <a:rPr lang="en-US" sz="2400" dirty="0">
+                  <a:solidFill>
+                    <a:schemeClr val="tx1"/>
+                  </a:solidFill>
+                </a:rPr>
+                <a:t>Exit</a:t>
+              </a:r>
+            </a:p>
+          </p:txBody>
+        </p:sp>
+        <p:cxnSp>
+          <p:nvCxnSpPr>
+            <p:cNvPr id="12" name="Curved Connector 11">
+              <a:extLst>
+                <a:ext uri="{FF2B5EF4-FFF2-40B4-BE49-F238E27FC236}">
+                  <a16:creationId xmlns:a16="http://schemas.microsoft.com/office/drawing/2014/main" id="{A7AA59C3-4BCF-280D-F7E2-DEE255FACB16}"/>
+                </a:ext>
+              </a:extLst>
+            </p:cNvPr>
+            <p:cNvCxnSpPr>
+              <a:cxnSpLocks/>
+              <a:stCxn id="7" idx="4"/>
+              <a:endCxn id="10" idx="2"/>
+            </p:cNvCxnSpPr>
+            <p:nvPr/>
+          </p:nvCxnSpPr>
+          <p:spPr>
+            <a:xfrm rot="16200000" flipH="1">
+              <a:off x="2633662" y="2751729"/>
+              <a:ext cx="2588369" cy="2486248"/>
+            </a:xfrm>
+            <a:prstGeom prst="curvedConnector2">
+              <a:avLst/>
+            </a:prstGeom>
+            <a:ln w="31750">
+              <a:solidFill>
+                <a:schemeClr val="tx1"/>
+              </a:solidFill>
+              <a:tailEnd type="triangle" w="lg" len="lg"/>
+            </a:ln>
+          </p:spPr>
+          <p:style>
+            <a:lnRef idx="2">
+              <a:schemeClr val="accent1"/>
+            </a:lnRef>
+            <a:fillRef idx="0">
+              <a:schemeClr val="accent1"/>
+            </a:fillRef>
+            <a:effectRef idx="1">
+              <a:schemeClr val="accent1"/>
+            </a:effectRef>
+            <a:fontRef idx="minor">
+              <a:schemeClr val="tx1"/>
+            </a:fontRef>
+          </p:style>
+        </p:cxnSp>
+        <p:cxnSp>
+          <p:nvCxnSpPr>
+            <p:cNvPr id="13" name="Curved Connector 12">
+              <a:extLst>
+                <a:ext uri="{FF2B5EF4-FFF2-40B4-BE49-F238E27FC236}">
+                  <a16:creationId xmlns:a16="http://schemas.microsoft.com/office/drawing/2014/main" id="{D60DBBD2-D050-B8C1-729E-39D9DBE8FC92}"/>
+                </a:ext>
+              </a:extLst>
+            </p:cNvPr>
+            <p:cNvCxnSpPr>
+              <a:cxnSpLocks/>
+              <a:stCxn id="8" idx="7"/>
+              <a:endCxn id="9" idx="1"/>
+            </p:cNvCxnSpPr>
+            <p:nvPr/>
+          </p:nvCxnSpPr>
+          <p:spPr>
+            <a:xfrm rot="5400000" flipH="1" flipV="1">
+              <a:off x="7985054" y="549093"/>
+              <a:ext cx="12700" cy="2052439"/>
+            </a:xfrm>
+            <a:prstGeom prst="curvedConnector3">
+              <a:avLst>
+                <a:gd name="adj1" fmla="val 3320323"/>
+              </a:avLst>
+            </a:prstGeom>
+            <a:ln w="31750">
+              <a:solidFill>
+                <a:schemeClr val="tx1"/>
+              </a:solidFill>
+              <a:tailEnd type="triangle" w="lg" len="lg"/>
+            </a:ln>
+          </p:spPr>
+          <p:style>
+            <a:lnRef idx="2">
+              <a:schemeClr val="accent1"/>
+            </a:lnRef>
+            <a:fillRef idx="0">
+              <a:schemeClr val="accent1"/>
+            </a:fillRef>
+            <a:effectRef idx="1">
+              <a:schemeClr val="accent1"/>
+            </a:effectRef>
+            <a:fontRef idx="minor">
+              <a:schemeClr val="tx1"/>
+            </a:fontRef>
+          </p:style>
+        </p:cxnSp>
+        <p:cxnSp>
+          <p:nvCxnSpPr>
+            <p:cNvPr id="16" name="Curved Connector 15">
+              <a:extLst>
+                <a:ext uri="{FF2B5EF4-FFF2-40B4-BE49-F238E27FC236}">
+                  <a16:creationId xmlns:a16="http://schemas.microsoft.com/office/drawing/2014/main" id="{2BC81862-7639-7585-F29B-1F5EF22D3EF1}"/>
+                </a:ext>
+              </a:extLst>
+            </p:cNvPr>
+            <p:cNvCxnSpPr>
+              <a:cxnSpLocks/>
+              <a:stCxn id="9" idx="3"/>
+              <a:endCxn id="8" idx="5"/>
+            </p:cNvCxnSpPr>
+            <p:nvPr/>
+          </p:nvCxnSpPr>
+          <p:spPr>
+            <a:xfrm rot="5400000">
+              <a:off x="7985055" y="1481368"/>
+              <a:ext cx="12700" cy="2052439"/>
+            </a:xfrm>
+            <a:prstGeom prst="curvedConnector3">
+              <a:avLst>
+                <a:gd name="adj1" fmla="val 3320323"/>
+              </a:avLst>
+            </a:prstGeom>
+            <a:ln w="31750">
+              <a:solidFill>
+                <a:schemeClr val="tx1"/>
+              </a:solidFill>
+              <a:tailEnd type="triangle" w="lg" len="lg"/>
+            </a:ln>
+          </p:spPr>
+          <p:style>
+            <a:lnRef idx="2">
+              <a:schemeClr val="accent1"/>
+            </a:lnRef>
+            <a:fillRef idx="0">
+              <a:schemeClr val="accent1"/>
+            </a:fillRef>
+            <a:effectRef idx="1">
+              <a:schemeClr val="accent1"/>
+            </a:effectRef>
+            <a:fontRef idx="minor">
+              <a:schemeClr val="tx1"/>
+            </a:fontRef>
+          </p:style>
+        </p:cxnSp>
+        <p:cxnSp>
+          <p:nvCxnSpPr>
+            <p:cNvPr id="24" name="Curved Connector 23">
+              <a:extLst>
+                <a:ext uri="{FF2B5EF4-FFF2-40B4-BE49-F238E27FC236}">
+                  <a16:creationId xmlns:a16="http://schemas.microsoft.com/office/drawing/2014/main" id="{77EB4387-2A7C-3742-237D-464C6970D5E7}"/>
+                </a:ext>
+              </a:extLst>
+            </p:cNvPr>
+            <p:cNvCxnSpPr>
+              <a:cxnSpLocks/>
+              <a:stCxn id="7" idx="7"/>
+              <a:endCxn id="8" idx="1"/>
+            </p:cNvCxnSpPr>
+            <p:nvPr/>
+          </p:nvCxnSpPr>
+          <p:spPr>
+            <a:xfrm rot="5400000" flipH="1" flipV="1">
+              <a:off x="4451499" y="549094"/>
+              <a:ext cx="1" cy="2052439"/>
+            </a:xfrm>
+            <a:prstGeom prst="curvedConnector3">
+              <a:avLst>
+                <a:gd name="adj1" fmla="val 42168200000"/>
+              </a:avLst>
+            </a:prstGeom>
+            <a:ln w="31750">
+              <a:solidFill>
+                <a:schemeClr val="tx1"/>
+              </a:solidFill>
+              <a:tailEnd type="triangle" w="lg" len="lg"/>
+            </a:ln>
+          </p:spPr>
+          <p:style>
+            <a:lnRef idx="2">
+              <a:schemeClr val="accent1"/>
+            </a:lnRef>
+            <a:fillRef idx="0">
+              <a:schemeClr val="accent1"/>
+            </a:fillRef>
+            <a:effectRef idx="1">
+              <a:schemeClr val="accent1"/>
+            </a:effectRef>
+            <a:fontRef idx="minor">
+              <a:schemeClr val="tx1"/>
+            </a:fontRef>
+          </p:style>
+        </p:cxnSp>
+        <p:cxnSp>
+          <p:nvCxnSpPr>
+            <p:cNvPr id="30" name="Curved Connector 29">
+              <a:extLst>
+                <a:ext uri="{FF2B5EF4-FFF2-40B4-BE49-F238E27FC236}">
+                  <a16:creationId xmlns:a16="http://schemas.microsoft.com/office/drawing/2014/main" id="{D3944DD2-CE03-0BB1-FB47-2554B9446184}"/>
+                </a:ext>
+              </a:extLst>
+            </p:cNvPr>
+            <p:cNvCxnSpPr>
+              <a:cxnSpLocks/>
+              <a:stCxn id="8" idx="3"/>
+              <a:endCxn id="7" idx="5"/>
+            </p:cNvCxnSpPr>
+            <p:nvPr/>
+          </p:nvCxnSpPr>
+          <p:spPr>
+            <a:xfrm rot="5400000">
+              <a:off x="4451500" y="1481368"/>
+              <a:ext cx="1" cy="2052439"/>
+            </a:xfrm>
+            <a:prstGeom prst="curvedConnector3">
+              <a:avLst>
+                <a:gd name="adj1" fmla="val 42168200000"/>
+              </a:avLst>
+            </a:prstGeom>
+            <a:ln w="31750">
+              <a:solidFill>
+                <a:schemeClr val="tx1"/>
+              </a:solidFill>
+              <a:tailEnd type="triangle" w="lg" len="lg"/>
+            </a:ln>
+          </p:spPr>
+          <p:style>
+            <a:lnRef idx="2">
+              <a:schemeClr val="accent1"/>
+            </a:lnRef>
+            <a:fillRef idx="0">
+              <a:schemeClr val="accent1"/>
+            </a:fillRef>
+            <a:effectRef idx="1">
+              <a:schemeClr val="accent1"/>
+            </a:effectRef>
+            <a:fontRef idx="minor">
+              <a:schemeClr val="tx1"/>
+            </a:fontRef>
+          </p:style>
+        </p:cxnSp>
+        <p:cxnSp>
+          <p:nvCxnSpPr>
+            <p:cNvPr id="33" name="Curved Connector 32">
+              <a:extLst>
+                <a:ext uri="{FF2B5EF4-FFF2-40B4-BE49-F238E27FC236}">
+                  <a16:creationId xmlns:a16="http://schemas.microsoft.com/office/drawing/2014/main" id="{FC059695-854A-2C71-1276-63A0B2F6D347}"/>
+                </a:ext>
+              </a:extLst>
+            </p:cNvPr>
+            <p:cNvCxnSpPr>
+              <a:cxnSpLocks/>
+              <a:stCxn id="9" idx="4"/>
+              <a:endCxn id="10" idx="6"/>
+            </p:cNvCxnSpPr>
+            <p:nvPr/>
+          </p:nvCxnSpPr>
+          <p:spPr>
+            <a:xfrm rot="5400000">
+              <a:off x="7214523" y="2751729"/>
+              <a:ext cx="2588370" cy="2486248"/>
+            </a:xfrm>
+            <a:prstGeom prst="curvedConnector2">
+              <a:avLst/>
+            </a:prstGeom>
+            <a:ln w="31750">
+              <a:solidFill>
+                <a:schemeClr val="tx1"/>
+              </a:solidFill>
+              <a:tailEnd type="triangle" w="lg" len="lg"/>
+            </a:ln>
+          </p:spPr>
+          <p:style>
+            <a:lnRef idx="2">
+              <a:schemeClr val="accent1"/>
+            </a:lnRef>
+            <a:fillRef idx="0">
+              <a:schemeClr val="accent1"/>
+            </a:fillRef>
+            <a:effectRef idx="1">
+              <a:schemeClr val="accent1"/>
+            </a:effectRef>
+            <a:fontRef idx="minor">
+              <a:schemeClr val="tx1"/>
+            </a:fontRef>
+          </p:style>
+        </p:cxnSp>
+        <p:cxnSp>
+          <p:nvCxnSpPr>
+            <p:cNvPr id="116" name="Curved Connector 115">
+              <a:extLst>
+                <a:ext uri="{FF2B5EF4-FFF2-40B4-BE49-F238E27FC236}">
+                  <a16:creationId xmlns:a16="http://schemas.microsoft.com/office/drawing/2014/main" id="{BA41D891-67CF-75D7-E7DE-C001B9FF5249}"/>
+                </a:ext>
+              </a:extLst>
+            </p:cNvPr>
+            <p:cNvCxnSpPr>
+              <a:cxnSpLocks/>
+              <a:stCxn id="8" idx="4"/>
+              <a:endCxn id="10" idx="0"/>
+            </p:cNvCxnSpPr>
+            <p:nvPr/>
+          </p:nvCxnSpPr>
+          <p:spPr>
+            <a:xfrm rot="5400000">
+              <a:off x="5253702" y="3665243"/>
+              <a:ext cx="1929151" cy="12700"/>
+            </a:xfrm>
+            <a:prstGeom prst="curvedConnector3">
+              <a:avLst>
+                <a:gd name="adj1" fmla="val 50000"/>
+              </a:avLst>
+            </a:prstGeom>
+            <a:ln w="31750">
+              <a:solidFill>
+                <a:schemeClr val="tx1"/>
+              </a:solidFill>
+              <a:tailEnd type="triangle" w="lg" len="lg"/>
+            </a:ln>
+          </p:spPr>
+          <p:style>
+            <a:lnRef idx="2">
+              <a:schemeClr val="accent1"/>
+            </a:lnRef>
+            <a:fillRef idx="0">
+              <a:schemeClr val="accent1"/>
+            </a:fillRef>
+            <a:effectRef idx="1">
+              <a:schemeClr val="accent1"/>
+            </a:effectRef>
+            <a:fontRef idx="minor">
+              <a:schemeClr val="tx1"/>
+            </a:fontRef>
+          </p:style>
+        </p:cxnSp>
+        <p:sp>
+          <p:nvSpPr>
+            <p:cNvPr id="139" name="TextBox 138">
+              <a:extLst>
+                <a:ext uri="{FF2B5EF4-FFF2-40B4-BE49-F238E27FC236}">
+                  <a16:creationId xmlns:a16="http://schemas.microsoft.com/office/drawing/2014/main" id="{5D097917-F7AE-4AD1-130B-D377BE720DD7}"/>
+                </a:ext>
+              </a:extLst>
+            </p:cNvPr>
+            <p:cNvSpPr txBox="1"/>
+            <p:nvPr/>
+          </p:nvSpPr>
+          <p:spPr>
+            <a:xfrm>
+              <a:off x="4170812" y="685262"/>
+              <a:ext cx="561372" cy="461665"/>
+            </a:xfrm>
+            <a:prstGeom prst="rect">
+              <a:avLst/>
+            </a:prstGeom>
+            <a:noFill/>
+          </p:spPr>
+          <p:txBody>
+            <a:bodyPr wrap="none" rtlCol="0">
+              <a:spAutoFit/>
+            </a:bodyPr>
+            <a:lstStyle/>
+            <a:p>
+              <a:r>
+                <a:rPr lang="en-US" sz="2400" i="1" dirty="0"/>
+                <a:t>r</a:t>
+              </a:r>
+              <a:r>
+                <a:rPr lang="en-US" sz="2400" i="1" baseline="-25000" dirty="0"/>
+                <a:t>2,3</a:t>
+              </a:r>
+            </a:p>
+          </p:txBody>
+        </p:sp>
+        <p:sp>
+          <p:nvSpPr>
+            <p:cNvPr id="140" name="TextBox 139">
+              <a:extLst>
+                <a:ext uri="{FF2B5EF4-FFF2-40B4-BE49-F238E27FC236}">
+                  <a16:creationId xmlns:a16="http://schemas.microsoft.com/office/drawing/2014/main" id="{C4A6F63D-2092-1FC7-9B17-FAEB8FB1A9CF}"/>
+                </a:ext>
+              </a:extLst>
+            </p:cNvPr>
+            <p:cNvSpPr txBox="1"/>
+            <p:nvPr/>
+          </p:nvSpPr>
+          <p:spPr>
+            <a:xfrm>
+              <a:off x="4170812" y="2469834"/>
+              <a:ext cx="561372" cy="461665"/>
+            </a:xfrm>
+            <a:prstGeom prst="rect">
+              <a:avLst/>
+            </a:prstGeom>
+            <a:noFill/>
+          </p:spPr>
+          <p:txBody>
+            <a:bodyPr wrap="none" rtlCol="0">
+              <a:spAutoFit/>
+            </a:bodyPr>
+            <a:lstStyle/>
+            <a:p>
+              <a:r>
+                <a:rPr lang="en-US" sz="2400" i="1" dirty="0"/>
+                <a:t>r</a:t>
+              </a:r>
+              <a:r>
+                <a:rPr lang="en-US" sz="2400" i="1" baseline="-25000" dirty="0"/>
+                <a:t>3,2</a:t>
+              </a:r>
+            </a:p>
+          </p:txBody>
+        </p:sp>
+        <p:sp>
+          <p:nvSpPr>
+            <p:cNvPr id="141" name="TextBox 140">
+              <a:extLst>
+                <a:ext uri="{FF2B5EF4-FFF2-40B4-BE49-F238E27FC236}">
+                  <a16:creationId xmlns:a16="http://schemas.microsoft.com/office/drawing/2014/main" id="{81253307-5F7C-8BEB-6F43-9691D38147F3}"/>
+                </a:ext>
+              </a:extLst>
+            </p:cNvPr>
+            <p:cNvSpPr txBox="1"/>
+            <p:nvPr/>
+          </p:nvSpPr>
+          <p:spPr>
+            <a:xfrm>
+              <a:off x="7704368" y="2438435"/>
+              <a:ext cx="684803" cy="461665"/>
+            </a:xfrm>
+            <a:prstGeom prst="rect">
+              <a:avLst/>
+            </a:prstGeom>
+            <a:noFill/>
+          </p:spPr>
+          <p:txBody>
+            <a:bodyPr wrap="none" rtlCol="0">
+              <a:spAutoFit/>
+            </a:bodyPr>
+            <a:lstStyle/>
+            <a:p>
+              <a:r>
+                <a:rPr lang="en-US" sz="2400" i="1" dirty="0"/>
+                <a:t>r</a:t>
+              </a:r>
+              <a:r>
+                <a:rPr lang="en-US" sz="2400" i="1" baseline="-25000" dirty="0"/>
+                <a:t>3-I,3</a:t>
+              </a:r>
+            </a:p>
+          </p:txBody>
+        </p:sp>
+        <p:sp>
+          <p:nvSpPr>
+            <p:cNvPr id="142" name="TextBox 141">
+              <a:extLst>
+                <a:ext uri="{FF2B5EF4-FFF2-40B4-BE49-F238E27FC236}">
+                  <a16:creationId xmlns:a16="http://schemas.microsoft.com/office/drawing/2014/main" id="{20B5C4BF-A5F8-48B4-3D0D-61F12375509B}"/>
+                </a:ext>
+              </a:extLst>
+            </p:cNvPr>
+            <p:cNvSpPr txBox="1"/>
+            <p:nvPr/>
+          </p:nvSpPr>
+          <p:spPr>
+            <a:xfrm>
+              <a:off x="7704368" y="678911"/>
+              <a:ext cx="684803" cy="461665"/>
+            </a:xfrm>
+            <a:prstGeom prst="rect">
+              <a:avLst/>
+            </a:prstGeom>
+            <a:noFill/>
+          </p:spPr>
+          <p:txBody>
+            <a:bodyPr wrap="none" rtlCol="0">
+              <a:spAutoFit/>
+            </a:bodyPr>
+            <a:lstStyle/>
+            <a:p>
+              <a:r>
+                <a:rPr lang="en-US" sz="2400" i="1" dirty="0"/>
+                <a:t>r</a:t>
+              </a:r>
+              <a:r>
+                <a:rPr lang="en-US" sz="2400" i="1" baseline="-25000" dirty="0"/>
+                <a:t>3,3-I</a:t>
+              </a:r>
+            </a:p>
+          </p:txBody>
+        </p:sp>
+        <p:sp>
+          <p:nvSpPr>
+            <p:cNvPr id="143" name="TextBox 142">
+              <a:extLst>
+                <a:ext uri="{FF2B5EF4-FFF2-40B4-BE49-F238E27FC236}">
+                  <a16:creationId xmlns:a16="http://schemas.microsoft.com/office/drawing/2014/main" id="{96748D2C-2E71-952C-6F03-1152B72DA5F2}"/>
+                </a:ext>
+              </a:extLst>
+            </p:cNvPr>
+            <p:cNvSpPr txBox="1"/>
+            <p:nvPr/>
+          </p:nvSpPr>
+          <p:spPr>
+            <a:xfrm>
+              <a:off x="9214569" y="3994853"/>
+              <a:ext cx="585417" cy="461665"/>
+            </a:xfrm>
+            <a:prstGeom prst="rect">
+              <a:avLst/>
+            </a:prstGeom>
+            <a:noFill/>
+          </p:spPr>
+          <p:txBody>
+            <a:bodyPr wrap="none" rtlCol="0">
+              <a:spAutoFit/>
+            </a:bodyPr>
+            <a:lstStyle/>
+            <a:p>
+              <a:r>
+                <a:rPr lang="en-US" sz="2400" i="1" dirty="0"/>
+                <a:t>𝜇</a:t>
+              </a:r>
+              <a:r>
+                <a:rPr lang="en-US" sz="2400" i="1" baseline="-25000" dirty="0"/>
+                <a:t>3-I</a:t>
+              </a:r>
+            </a:p>
+          </p:txBody>
+        </p:sp>
+        <p:sp>
+          <p:nvSpPr>
+            <p:cNvPr id="144" name="TextBox 143">
+              <a:extLst>
+                <a:ext uri="{FF2B5EF4-FFF2-40B4-BE49-F238E27FC236}">
+                  <a16:creationId xmlns:a16="http://schemas.microsoft.com/office/drawing/2014/main" id="{9425D72B-AE61-E48E-A4BB-027CC5AB3DB1}"/>
+                </a:ext>
+              </a:extLst>
+            </p:cNvPr>
+            <p:cNvSpPr txBox="1"/>
+            <p:nvPr/>
+          </p:nvSpPr>
+          <p:spPr>
+            <a:xfrm>
+              <a:off x="6198062" y="3386087"/>
+              <a:ext cx="461986" cy="461665"/>
+            </a:xfrm>
+            <a:prstGeom prst="rect">
+              <a:avLst/>
+            </a:prstGeom>
+            <a:noFill/>
+          </p:spPr>
+          <p:txBody>
+            <a:bodyPr wrap="none" rtlCol="0">
+              <a:spAutoFit/>
+            </a:bodyPr>
+            <a:lstStyle/>
+            <a:p>
+              <a:r>
+                <a:rPr lang="en-US" sz="2400" i="1" dirty="0"/>
+                <a:t>𝜇</a:t>
+              </a:r>
+              <a:r>
+                <a:rPr lang="en-US" sz="2400" i="1" baseline="-25000" dirty="0"/>
+                <a:t>3</a:t>
+              </a:r>
+            </a:p>
+          </p:txBody>
+        </p:sp>
+        <p:sp>
+          <p:nvSpPr>
+            <p:cNvPr id="146" name="TextBox 145">
+              <a:extLst>
+                <a:ext uri="{FF2B5EF4-FFF2-40B4-BE49-F238E27FC236}">
+                  <a16:creationId xmlns:a16="http://schemas.microsoft.com/office/drawing/2014/main" id="{2B059E1B-7569-B4AA-25FC-F6078008A192}"/>
+                </a:ext>
+              </a:extLst>
+            </p:cNvPr>
+            <p:cNvSpPr txBox="1"/>
+            <p:nvPr/>
+          </p:nvSpPr>
+          <p:spPr>
+            <a:xfrm>
+              <a:off x="2903930" y="4225685"/>
+              <a:ext cx="461986" cy="461665"/>
+            </a:xfrm>
+            <a:prstGeom prst="rect">
+              <a:avLst/>
+            </a:prstGeom>
+            <a:noFill/>
+          </p:spPr>
+          <p:txBody>
+            <a:bodyPr wrap="none" rtlCol="0">
+              <a:spAutoFit/>
+            </a:bodyPr>
+            <a:lstStyle/>
+            <a:p>
+              <a:r>
+                <a:rPr lang="en-US" sz="2400" i="1" dirty="0"/>
+                <a:t>𝜇</a:t>
+              </a:r>
+              <a:r>
+                <a:rPr lang="en-US" sz="2400" i="1" baseline="-25000" dirty="0"/>
+                <a:t>2</a:t>
+              </a:r>
+            </a:p>
+          </p:txBody>
+        </p:sp>
+      </p:grpSp>
+    </p:spTree>
+    <p:extLst>
+      <p:ext uri="{BB962C8B-B14F-4D97-AF65-F5344CB8AC3E}">
+        <p14:creationId xmlns:p14="http://schemas.microsoft.com/office/powerpoint/2010/main" val="4075957273"/>
       </p:ext>
     </p:extLst>
   </p:cSld>
